--- a/docs/명함/K-Hub_Partners_명함_최은성.pptx
+++ b/docs/명함/K-Hub_Partners_명함_최은성.pptx
@@ -1245,7 +1245,7 @@
         <p:spPr>
           <a:xfrm>
             <a:off x="2150236" y="3733111"/>
-            <a:ext cx="864972" cy="400110"/>
+            <a:ext cx="1234440" cy="400110"/>
           </a:xfrm>
           <a:prstGeom prst="rect">
             <a:avLst/>
@@ -1253,7 +1253,7 @@
           <a:noFill/>
         </p:spPr>
         <p:txBody>
-          <a:bodyPr wrap="square">
+          <a:bodyPr wrap="none">
             <a:spAutoFit/>
           </a:bodyPr>
           <a:lstStyle/>
@@ -1270,7 +1270,7 @@
                 <a:ea typeface="Noto Sans KR" pitchFamily="34" charset="-122"/>
                 <a:cs typeface="Noto Sans KR" pitchFamily="34" charset="-120"/>
               </a:rPr>
-              <a:t>이 사</a:t>
+              <a:t>심사역</a:t>
             </a:r>
             <a:endParaRPr lang="en-US" altLang="ko-KR" sz="2000" dirty="0"/>
           </a:p>
@@ -1632,7 +1632,7 @@
         <p:spPr>
           <a:xfrm>
             <a:off x="2761488" y="3913632"/>
-            <a:ext cx="1176618" cy="228600"/>
+            <a:ext cx="1920240" cy="228600"/>
           </a:xfrm>
           <a:prstGeom prst="rect">
             <a:avLst/>
@@ -1649,7 +1649,7 @@
             </a:pPr>
             <a:r>
               <a:rPr lang="en-US" sz="1500" dirty="0"/>
-              <a:t>Director</a:t>
+              <a:t>Investment Manager</a:t>
             </a:r>
           </a:p>
         </p:txBody>
